--- a/images/helper.pptx
+++ b/images/helper.pptx
@@ -199,7 +199,7 @@
           <a:p>
             <a:fld id="{A8356AEC-813A-2645-BCA0-F23E9A8AC945}" type="datetimeFigureOut">
               <a:rPr lang="en-US" smtClean="0"/>
-              <a:t>10/9/26</a:t>
+              <a:t>10/13/26</a:t>
             </a:fld>
             <a:endParaRPr lang="en-US"/>
           </a:p>
@@ -697,7 +697,7 @@
           <a:p>
             <a:fld id="{1523FE02-58FD-1E4F-8E1C-AE35C2B04355}" type="datetimeFigureOut">
               <a:rPr lang="en-US" smtClean="0"/>
-              <a:t>10/9/26</a:t>
+              <a:t>10/13/26</a:t>
             </a:fld>
             <a:endParaRPr lang="en-US"/>
           </a:p>
@@ -895,7 +895,7 @@
           <a:p>
             <a:fld id="{1523FE02-58FD-1E4F-8E1C-AE35C2B04355}" type="datetimeFigureOut">
               <a:rPr lang="en-US" smtClean="0"/>
-              <a:t>10/9/26</a:t>
+              <a:t>10/13/26</a:t>
             </a:fld>
             <a:endParaRPr lang="en-US"/>
           </a:p>
@@ -1103,7 +1103,7 @@
           <a:p>
             <a:fld id="{1523FE02-58FD-1E4F-8E1C-AE35C2B04355}" type="datetimeFigureOut">
               <a:rPr lang="en-US" smtClean="0"/>
-              <a:t>10/9/26</a:t>
+              <a:t>10/13/26</a:t>
             </a:fld>
             <a:endParaRPr lang="en-US"/>
           </a:p>
@@ -1301,7 +1301,7 @@
           <a:p>
             <a:fld id="{1523FE02-58FD-1E4F-8E1C-AE35C2B04355}" type="datetimeFigureOut">
               <a:rPr lang="en-US" smtClean="0"/>
-              <a:t>10/9/26</a:t>
+              <a:t>10/13/26</a:t>
             </a:fld>
             <a:endParaRPr lang="en-US"/>
           </a:p>
@@ -1576,7 +1576,7 @@
           <a:p>
             <a:fld id="{1523FE02-58FD-1E4F-8E1C-AE35C2B04355}" type="datetimeFigureOut">
               <a:rPr lang="en-US" smtClean="0"/>
-              <a:t>10/9/26</a:t>
+              <a:t>10/13/26</a:t>
             </a:fld>
             <a:endParaRPr lang="en-US"/>
           </a:p>
@@ -1841,7 +1841,7 @@
           <a:p>
             <a:fld id="{1523FE02-58FD-1E4F-8E1C-AE35C2B04355}" type="datetimeFigureOut">
               <a:rPr lang="en-US" smtClean="0"/>
-              <a:t>10/9/26</a:t>
+              <a:t>10/13/26</a:t>
             </a:fld>
             <a:endParaRPr lang="en-US"/>
           </a:p>
@@ -2253,7 +2253,7 @@
           <a:p>
             <a:fld id="{1523FE02-58FD-1E4F-8E1C-AE35C2B04355}" type="datetimeFigureOut">
               <a:rPr lang="en-US" smtClean="0"/>
-              <a:t>10/9/26</a:t>
+              <a:t>10/13/26</a:t>
             </a:fld>
             <a:endParaRPr lang="en-US"/>
           </a:p>
@@ -2394,7 +2394,7 @@
           <a:p>
             <a:fld id="{1523FE02-58FD-1E4F-8E1C-AE35C2B04355}" type="datetimeFigureOut">
               <a:rPr lang="en-US" smtClean="0"/>
-              <a:t>10/9/26</a:t>
+              <a:t>10/13/26</a:t>
             </a:fld>
             <a:endParaRPr lang="en-US"/>
           </a:p>
@@ -2507,7 +2507,7 @@
           <a:p>
             <a:fld id="{1523FE02-58FD-1E4F-8E1C-AE35C2B04355}" type="datetimeFigureOut">
               <a:rPr lang="en-US" smtClean="0"/>
-              <a:t>10/9/26</a:t>
+              <a:t>10/13/26</a:t>
             </a:fld>
             <a:endParaRPr lang="en-US"/>
           </a:p>
@@ -2818,7 +2818,7 @@
           <a:p>
             <a:fld id="{1523FE02-58FD-1E4F-8E1C-AE35C2B04355}" type="datetimeFigureOut">
               <a:rPr lang="en-US" smtClean="0"/>
-              <a:t>10/9/26</a:t>
+              <a:t>10/13/26</a:t>
             </a:fld>
             <a:endParaRPr lang="en-US"/>
           </a:p>
@@ -3106,7 +3106,7 @@
           <a:p>
             <a:fld id="{1523FE02-58FD-1E4F-8E1C-AE35C2B04355}" type="datetimeFigureOut">
               <a:rPr lang="en-US" smtClean="0"/>
-              <a:t>10/9/26</a:t>
+              <a:t>10/13/26</a:t>
             </a:fld>
             <a:endParaRPr lang="en-US"/>
           </a:p>
@@ -3347,7 +3347,7 @@
           <a:p>
             <a:fld id="{1523FE02-58FD-1E4F-8E1C-AE35C2B04355}" type="datetimeFigureOut">
               <a:rPr lang="en-US" smtClean="0"/>
-              <a:t>10/9/26</a:t>
+              <a:t>10/13/26</a:t>
             </a:fld>
             <a:endParaRPr lang="en-US"/>
           </a:p>
@@ -3800,9 +3800,8 @@
           </p:nvPicPr>
           <p:blipFill>
             <a:blip r:embed="rId2"/>
-            <a:stretch>
-              <a:fillRect/>
-            </a:stretch>
+            <a:srcRect/>
+            <a:stretch/>
           </p:blipFill>
           <p:spPr>
             <a:xfrm>
